--- a/docs/assets/intro-deck/virtual-intelligent-dev-team-intro.pptx
+++ b/docs/assets/intro-deck/virtual-intelligent-dev-team-intro.pptx
@@ -15,6 +15,7 @@
     <p:sldId id="263" r:id="rId14"/>
     <p:sldId id="264" r:id="rId15"/>
     <p:sldId id="265" r:id="rId16"/>
+    <p:sldId id="266" r:id="rId17"/>
   </p:sldIdLst>
   <p:sldSz cx="12191695" cy="6858000" type="screen4x3"/>
   <p:notesSz cx="6858000" cy="9144000"/>
@@ -3814,7 +3815,7 @@
                 </a:solidFill>
                 <a:latin typeface="PingFang SC"/>
               </a:rPr>
-              <a:t>01 / 10</a:t>
+              <a:t>01 / 11</a:t>
             </a:r>
           </a:p>
         </p:txBody>
@@ -3910,7 +3911,7 @@
                 </a:solidFill>
                 <a:latin typeface="PingFang SC"/>
               </a:rPr>
-              <a:t>GET STARTED · 开始使用</a:t>
+              <a:t>ENGINEERING · 工程化四支柱</a:t>
             </a:r>
           </a:p>
         </p:txBody>
@@ -3945,7 +3946,602 @@
                 </a:solidFill>
                 <a:latin typeface="PingFang SC"/>
               </a:rPr>
-              <a:t>10 / 10</a:t>
+              <a:t>10 / 11</a:t>
+            </a:r>
+          </a:p>
+        </p:txBody>
+      </p:sp>
+      <p:sp>
+        <p:nvSpPr>
+          <p:cNvPr id="5" name="TextBox 4"/>
+          <p:cNvSpPr txBox="1"/>
+          <p:nvPr/>
+        </p:nvSpPr>
+        <p:spPr>
+          <a:xfrm>
+            <a:off x="548640" y="868680"/>
+            <a:ext cx="11064240" cy="822960"/>
+          </a:xfrm>
+          <a:prstGeom prst="rect">
+            <a:avLst/>
+          </a:prstGeom>
+          <a:noFill/>
+        </p:spPr>
+        <p:txBody>
+          <a:bodyPr wrap="square" lIns="0" tIns="0">
+            <a:spAutoFit/>
+          </a:bodyPr>
+          <a:lstStyle/>
+          <a:p>
+            <a:pPr algn="l"/>
+            <a:r>
+              <a:rPr sz="3600" b="1">
+                <a:solidFill>
+                  <a:srgbClr val="FFFFFF"/>
+                </a:solidFill>
+                <a:latin typeface="Helvetica"/>
+              </a:rPr>
+              <a:t>Engineering </a:t>
+            </a:r>
+            <a:r>
+              <a:rPr sz="3600" b="1">
+                <a:solidFill>
+                  <a:srgbClr val="00CED1"/>
+                </a:solidFill>
+                <a:latin typeface="Helvetica"/>
+              </a:rPr>
+              <a:t>Pillars</a:t>
+            </a:r>
+          </a:p>
+        </p:txBody>
+      </p:sp>
+      <p:sp>
+        <p:nvSpPr>
+          <p:cNvPr id="6" name="TextBox 5"/>
+          <p:cNvSpPr txBox="1"/>
+          <p:nvPr/>
+        </p:nvSpPr>
+        <p:spPr>
+          <a:xfrm>
+            <a:off x="548640" y="1691640"/>
+            <a:ext cx="11064240" cy="365760"/>
+          </a:xfrm>
+          <a:prstGeom prst="rect">
+            <a:avLst/>
+          </a:prstGeom>
+          <a:noFill/>
+        </p:spPr>
+        <p:txBody>
+          <a:bodyPr wrap="square" lIns="0" rIns="0" tIns="0" bIns="0" anchor="t">
+            <a:spAutoFit/>
+          </a:bodyPr>
+          <a:lstStyle/>
+          <a:p>
+            <a:pPr algn="l"/>
+            <a:r>
+              <a:rPr sz="1800" b="0">
+                <a:solidFill>
+                  <a:srgbClr val="C4B5FD"/>
+                </a:solidFill>
+                <a:latin typeface="PingFang SC"/>
+              </a:rPr>
+              <a:t>让 LLM 在真实软件工程里更可靠的四根工程化门禁支柱</a:t>
+            </a:r>
+          </a:p>
+        </p:txBody>
+      </p:sp>
+      <p:sp>
+        <p:nvSpPr>
+          <p:cNvPr id="7" name="Rounded Rectangle 6"/>
+          <p:cNvSpPr/>
+          <p:nvPr/>
+        </p:nvSpPr>
+        <p:spPr>
+          <a:xfrm>
+            <a:off x="548640" y="2377440"/>
+            <a:ext cx="2697480" cy="3474720"/>
+          </a:xfrm>
+          <a:prstGeom prst="roundRect">
+            <a:avLst>
+              <a:gd name="adj" fmla="val 6000"/>
+            </a:avLst>
+          </a:prstGeom>
+          <a:solidFill>
+            <a:srgbClr val="13102A"/>
+          </a:solidFill>
+          <a:ln w="15875">
+            <a:solidFill>
+              <a:srgbClr val="00CED1"/>
+            </a:solidFill>
+          </a:ln>
+        </p:spPr>
+        <p:style>
+          <a:lnRef idx="1">
+            <a:schemeClr val="accent1"/>
+          </a:lnRef>
+          <a:fillRef idx="3">
+            <a:schemeClr val="accent1"/>
+          </a:fillRef>
+          <a:effectRef idx="2">
+            <a:schemeClr val="accent1"/>
+          </a:effectRef>
+          <a:fontRef idx="minor">
+            <a:schemeClr val="lt1"/>
+          </a:fontRef>
+        </p:style>
+        <p:txBody>
+          <a:bodyPr rtlCol="0" anchor="t" wrap="square" lIns="228600" rIns="228600" tIns="228600" bIns="228600"/>
+          <a:lstStyle/>
+          <a:p>
+            <a:pPr algn="l"/>
+            <a:r>
+              <a:rPr sz="3200" b="1">
+                <a:solidFill>
+                  <a:srgbClr val="00CED1"/>
+                </a:solidFill>
+                <a:latin typeface="Helvetica"/>
+              </a:rPr>
+              <a:t>P1</a:t>
+            </a:r>
+          </a:p>
+          <a:p>
+            <a:pPr algn="l"/>
+            <a:r>
+              <a:rPr sz="1500" b="1">
+                <a:solidFill>
+                  <a:srgbClr val="FFFFFF"/>
+                </a:solidFill>
+                <a:latin typeface="PingFang SC"/>
+              </a:rPr>
+              <a:t>Harness 工程约束门禁</a:t>
+            </a:r>
+          </a:p>
+          <a:p>
+            <a:pPr algn="l"/>
+            <a:r>
+              <a:rPr sz="1200" b="0">
+                <a:solidFill>
+                  <a:srgbClr val="C4B5FD"/>
+                </a:solidFill>
+                <a:latin typeface="PingFang SC"/>
+              </a:rPr>
+              <a:t>6 个 code-facing bundle 执行前必须创建 engineering-constraints.md，含 5 个必填章节</a:t>
+            </a:r>
+          </a:p>
+        </p:txBody>
+      </p:sp>
+      <p:sp>
+        <p:nvSpPr>
+          <p:cNvPr id="8" name="Rounded Rectangle 7"/>
+          <p:cNvSpPr/>
+          <p:nvPr/>
+        </p:nvSpPr>
+        <p:spPr>
+          <a:xfrm>
+            <a:off x="3364992" y="2377440"/>
+            <a:ext cx="2697480" cy="3474720"/>
+          </a:xfrm>
+          <a:prstGeom prst="roundRect">
+            <a:avLst>
+              <a:gd name="adj" fmla="val 6000"/>
+            </a:avLst>
+          </a:prstGeom>
+          <a:solidFill>
+            <a:srgbClr val="13102A"/>
+          </a:solidFill>
+          <a:ln w="15875">
+            <a:solidFill>
+              <a:srgbClr val="9B4DCA"/>
+            </a:solidFill>
+          </a:ln>
+        </p:spPr>
+        <p:style>
+          <a:lnRef idx="1">
+            <a:schemeClr val="accent1"/>
+          </a:lnRef>
+          <a:fillRef idx="3">
+            <a:schemeClr val="accent1"/>
+          </a:fillRef>
+          <a:effectRef idx="2">
+            <a:schemeClr val="accent1"/>
+          </a:effectRef>
+          <a:fontRef idx="minor">
+            <a:schemeClr val="lt1"/>
+          </a:fontRef>
+        </p:style>
+        <p:txBody>
+          <a:bodyPr rtlCol="0" anchor="t" wrap="square" lIns="228600" rIns="228600" tIns="228600" bIns="228600"/>
+          <a:lstStyle/>
+          <a:p>
+            <a:pPr algn="l"/>
+            <a:r>
+              <a:rPr sz="3200" b="1">
+                <a:solidFill>
+                  <a:srgbClr val="9B4DCA"/>
+                </a:solidFill>
+                <a:latin typeface="Helvetica"/>
+              </a:rPr>
+              <a:t>P2</a:t>
+            </a:r>
+          </a:p>
+          <a:p>
+            <a:pPr algn="l"/>
+            <a:r>
+              <a:rPr sz="1500" b="1">
+                <a:solidFill>
+                  <a:srgbClr val="FFFFFF"/>
+                </a:solidFill>
+                <a:latin typeface="PingFang SC"/>
+              </a:rPr>
+              <a:t>Team Engine Lite 对抗式验收</a:t>
+            </a:r>
+          </a:p>
+          <a:p>
+            <a:pPr algn="l"/>
+            <a:r>
+              <a:rPr sz="1200" b="0">
+                <a:solidFill>
+                  <a:srgbClr val="C4B5FD"/>
+                </a:solidFill>
+                <a:latin typeface="PingFang SC"/>
+              </a:rPr>
+              <a:t>Worker/Verifier/Lead 分离 + DeliveryCycleReport + 3 级 runtime claim</a:t>
+            </a:r>
+          </a:p>
+        </p:txBody>
+      </p:sp>
+      <p:sp>
+        <p:nvSpPr>
+          <p:cNvPr id="9" name="Rounded Rectangle 8"/>
+          <p:cNvSpPr/>
+          <p:nvPr/>
+        </p:nvSpPr>
+        <p:spPr>
+          <a:xfrm>
+            <a:off x="6181344" y="2377440"/>
+            <a:ext cx="2697480" cy="3474720"/>
+          </a:xfrm>
+          <a:prstGeom prst="roundRect">
+            <a:avLst>
+              <a:gd name="adj" fmla="val 6000"/>
+            </a:avLst>
+          </a:prstGeom>
+          <a:solidFill>
+            <a:srgbClr val="13102A"/>
+          </a:solidFill>
+          <a:ln w="15875">
+            <a:solidFill>
+              <a:srgbClr val="FF1493"/>
+            </a:solidFill>
+          </a:ln>
+        </p:spPr>
+        <p:style>
+          <a:lnRef idx="1">
+            <a:schemeClr val="accent1"/>
+          </a:lnRef>
+          <a:fillRef idx="3">
+            <a:schemeClr val="accent1"/>
+          </a:fillRef>
+          <a:effectRef idx="2">
+            <a:schemeClr val="accent1"/>
+          </a:effectRef>
+          <a:fontRef idx="minor">
+            <a:schemeClr val="lt1"/>
+          </a:fontRef>
+        </p:style>
+        <p:txBody>
+          <a:bodyPr rtlCol="0" anchor="t" wrap="square" lIns="228600" rIns="228600" tIns="228600" bIns="228600"/>
+          <a:lstStyle/>
+          <a:p>
+            <a:pPr algn="l"/>
+            <a:r>
+              <a:rPr sz="3200" b="1">
+                <a:solidFill>
+                  <a:srgbClr val="FF1493"/>
+                </a:solidFill>
+                <a:latin typeface="Helvetica"/>
+              </a:rPr>
+              <a:t>P3</a:t>
+            </a:r>
+          </a:p>
+          <a:p>
+            <a:pPr algn="l"/>
+            <a:r>
+              <a:rPr sz="1500" b="1">
+                <a:solidFill>
+                  <a:srgbClr val="FFFFFF"/>
+                </a:solidFill>
+                <a:latin typeface="PingFang SC"/>
+              </a:rPr>
+              <a:t>Anti-Entropy 反熵治理</a:t>
+            </a:r>
+          </a:p>
+          <a:p>
+            <a:pPr algn="l"/>
+            <a:r>
+              <a:rPr sz="1200" b="0">
+                <a:solidFill>
+                  <a:srgbClr val="C4B5FD"/>
+                </a:solidFill>
+                <a:latin typeface="PingFang SC"/>
+              </a:rPr>
+              <a:t>delete-first / compat-exception / confirmation-first 三路径决策</a:t>
+            </a:r>
+          </a:p>
+        </p:txBody>
+      </p:sp>
+      <p:sp>
+        <p:nvSpPr>
+          <p:cNvPr id="10" name="Rounded Rectangle 9"/>
+          <p:cNvSpPr/>
+          <p:nvPr/>
+        </p:nvSpPr>
+        <p:spPr>
+          <a:xfrm>
+            <a:off x="8997696" y="2377440"/>
+            <a:ext cx="2697480" cy="3474720"/>
+          </a:xfrm>
+          <a:prstGeom prst="roundRect">
+            <a:avLst>
+              <a:gd name="adj" fmla="val 6000"/>
+            </a:avLst>
+          </a:prstGeom>
+          <a:solidFill>
+            <a:srgbClr val="13102A"/>
+          </a:solidFill>
+          <a:ln w="15875">
+            <a:solidFill>
+              <a:srgbClr val="FF1493"/>
+            </a:solidFill>
+          </a:ln>
+        </p:spPr>
+        <p:style>
+          <a:lnRef idx="1">
+            <a:schemeClr val="accent1"/>
+          </a:lnRef>
+          <a:fillRef idx="3">
+            <a:schemeClr val="accent1"/>
+          </a:fillRef>
+          <a:effectRef idx="2">
+            <a:schemeClr val="accent1"/>
+          </a:effectRef>
+          <a:fontRef idx="minor">
+            <a:schemeClr val="lt1"/>
+          </a:fontRef>
+        </p:style>
+        <p:txBody>
+          <a:bodyPr rtlCol="0" anchor="t" wrap="square" lIns="228600" rIns="228600" tIns="228600" bIns="228600"/>
+          <a:lstStyle/>
+          <a:p>
+            <a:pPr algn="l"/>
+            <a:r>
+              <a:rPr sz="3200" b="1">
+                <a:solidFill>
+                  <a:srgbClr val="FF1493"/>
+                </a:solidFill>
+                <a:latin typeface="Helvetica"/>
+              </a:rPr>
+              <a:t>P4</a:t>
+            </a:r>
+          </a:p>
+          <a:p>
+            <a:pPr algn="l"/>
+            <a:r>
+              <a:rPr sz="1500" b="1">
+                <a:solidFill>
+                  <a:srgbClr val="FFFFFF"/>
+                </a:solidFill>
+                <a:latin typeface="PingFang SC"/>
+              </a:rPr>
+              <a:t>Self-Optimization 自优化循环</a:t>
+            </a:r>
+          </a:p>
+          <a:p>
+            <a:pPr algn="l"/>
+            <a:r>
+              <a:rPr sz="1200" b="0">
+                <a:solidFill>
+                  <a:srgbClr val="C4B5FD"/>
+                </a:solidFill>
+                <a:latin typeface="PingFang SC"/>
+              </a:rPr>
+              <a:t>bounded iteration + mutation catalog + offline drill</a:t>
+            </a:r>
+          </a:p>
+        </p:txBody>
+      </p:sp>
+      <p:sp>
+        <p:nvSpPr>
+          <p:cNvPr id="11" name="Rounded Rectangle 10"/>
+          <p:cNvSpPr/>
+          <p:nvPr/>
+        </p:nvSpPr>
+        <p:spPr>
+          <a:xfrm>
+            <a:off x="548640" y="6080760"/>
+            <a:ext cx="11091672" cy="594360"/>
+          </a:xfrm>
+          <a:prstGeom prst="roundRect">
+            <a:avLst>
+              <a:gd name="adj" fmla="val 6000"/>
+            </a:avLst>
+          </a:prstGeom>
+          <a:solidFill>
+            <a:srgbClr val="13102A"/>
+          </a:solidFill>
+          <a:ln w="12700">
+            <a:solidFill>
+              <a:srgbClr val="00CED1"/>
+            </a:solidFill>
+          </a:ln>
+        </p:spPr>
+        <p:style>
+          <a:lnRef idx="1">
+            <a:schemeClr val="accent1"/>
+          </a:lnRef>
+          <a:fillRef idx="3">
+            <a:schemeClr val="accent1"/>
+          </a:fillRef>
+          <a:effectRef idx="2">
+            <a:schemeClr val="accent1"/>
+          </a:effectRef>
+          <a:fontRef idx="minor">
+            <a:schemeClr val="lt1"/>
+          </a:fontRef>
+        </p:style>
+        <p:txBody>
+          <a:bodyPr rtlCol="0" anchor="ctr" wrap="square" lIns="182880" rIns="182880" tIns="182880" bIns="182880"/>
+          <a:lstStyle/>
+          <a:p>
+            <a:pPr algn="l"/>
+            <a:r>
+              <a:rPr sz="1200" b="1">
+                <a:solidFill>
+                  <a:srgbClr val="00CED1"/>
+                </a:solidFill>
+                <a:latin typeface="PingFang SC"/>
+              </a:rPr>
+              <a:t>核心差异化：</a:t>
+            </a:r>
+            <a:r>
+              <a:rPr sz="1200" b="0">
+                <a:solidFill>
+                  <a:srgbClr val="C4B5FD"/>
+                </a:solidFill>
+                <a:latin typeface="PingFang SC"/>
+              </a:rPr>
+              <a:t>这四根支柱解决的是'实现前不约束、自产自审、旧路径永不退休、永远再来一轮'的真实软件工程痛点，而非'换几个角色回答'的表面问题。</a:t>
+            </a:r>
+          </a:p>
+        </p:txBody>
+      </p:sp>
+    </p:spTree>
+  </p:cSld>
+  <p:clrMapOvr>
+    <a:masterClrMapping/>
+  </p:clrMapOvr>
+</p:sld>
+</file>
+
+<file path=ppt/slides/slide11.xml><?xml version="1.0" encoding="utf-8"?>
+<p:sld xmlns:a="http://schemas.openxmlformats.org/drawingml/2006/main" xmlns:p="http://schemas.openxmlformats.org/presentationml/2006/main" xmlns:r="http://schemas.openxmlformats.org/officeDocument/2006/relationships">
+  <p:cSld>
+    <p:spTree>
+      <p:nvGrpSpPr>
+        <p:cNvPr id="1" name=""/>
+        <p:cNvGrpSpPr/>
+        <p:nvPr/>
+      </p:nvGrpSpPr>
+      <p:grpSpPr/>
+      <p:sp>
+        <p:nvSpPr>
+          <p:cNvPr id="2" name="Rectangle 1"/>
+          <p:cNvSpPr/>
+          <p:nvPr/>
+        </p:nvSpPr>
+        <p:spPr>
+          <a:xfrm>
+            <a:off x="0" y="0"/>
+            <a:ext cx="12191695" cy="6858000"/>
+          </a:xfrm>
+          <a:prstGeom prst="rect">
+            <a:avLst/>
+          </a:prstGeom>
+          <a:solidFill>
+            <a:srgbClr val="12122A"/>
+          </a:solidFill>
+          <a:ln>
+            <a:noFill/>
+          </a:ln>
+        </p:spPr>
+        <p:style>
+          <a:lnRef idx="1">
+            <a:schemeClr val="accent1"/>
+          </a:lnRef>
+          <a:fillRef idx="3">
+            <a:schemeClr val="accent1"/>
+          </a:fillRef>
+          <a:effectRef idx="2">
+            <a:schemeClr val="accent1"/>
+          </a:effectRef>
+          <a:fontRef idx="minor">
+            <a:schemeClr val="lt1"/>
+          </a:fontRef>
+        </p:style>
+        <p:txBody>
+          <a:bodyPr rtlCol="0" anchor="ctr"/>
+          <a:lstStyle/>
+          <a:p>
+            <a:pPr algn="ctr"/>
+          </a:p>
+        </p:txBody>
+      </p:sp>
+      <p:sp>
+        <p:nvSpPr>
+          <p:cNvPr id="3" name="TextBox 2"/>
+          <p:cNvSpPr txBox="1"/>
+          <p:nvPr/>
+        </p:nvSpPr>
+        <p:spPr>
+          <a:xfrm>
+            <a:off x="548640" y="365760"/>
+            <a:ext cx="5486400" cy="274320"/>
+          </a:xfrm>
+          <a:prstGeom prst="rect">
+            <a:avLst/>
+          </a:prstGeom>
+          <a:noFill/>
+        </p:spPr>
+        <p:txBody>
+          <a:bodyPr wrap="square" lIns="0" rIns="0" tIns="0" bIns="0" anchor="t">
+            <a:spAutoFit/>
+          </a:bodyPr>
+          <a:lstStyle/>
+          <a:p>
+            <a:pPr algn="l"/>
+            <a:r>
+              <a:rPr sz="1200" b="1">
+                <a:solidFill>
+                  <a:srgbClr val="00CED1"/>
+                </a:solidFill>
+                <a:latin typeface="PingFang SC"/>
+              </a:rPr>
+              <a:t>GET STARTED · 开始使用</a:t>
+            </a:r>
+          </a:p>
+        </p:txBody>
+      </p:sp>
+      <p:sp>
+        <p:nvSpPr>
+          <p:cNvPr id="4" name="TextBox 3"/>
+          <p:cNvSpPr txBox="1"/>
+          <p:nvPr/>
+        </p:nvSpPr>
+        <p:spPr>
+          <a:xfrm>
+            <a:off x="10607040" y="6400800"/>
+            <a:ext cx="1280160" cy="320040"/>
+          </a:xfrm>
+          <a:prstGeom prst="rect">
+            <a:avLst/>
+          </a:prstGeom>
+          <a:noFill/>
+        </p:spPr>
+        <p:txBody>
+          <a:bodyPr wrap="square" lIns="0" rIns="0" tIns="0" bIns="0" anchor="t">
+            <a:spAutoFit/>
+          </a:bodyPr>
+          <a:lstStyle/>
+          <a:p>
+            <a:pPr algn="r"/>
+            <a:r>
+              <a:rPr sz="1100" b="0">
+                <a:solidFill>
+                  <a:srgbClr val="8B6FC0"/>
+                </a:solidFill>
+                <a:latin typeface="PingFang SC"/>
+              </a:rPr>
+              <a:t>11 / 11</a:t>
             </a:r>
           </a:p>
         </p:txBody>
@@ -4532,7 +5128,7 @@
                 </a:solidFill>
                 <a:latin typeface="PingFang SC"/>
               </a:rPr>
-              <a:t>02 / 10</a:t>
+              <a:t>02 / 11</a:t>
             </a:r>
           </a:p>
         </p:txBody>
@@ -4991,7 +5587,7 @@
                 </a:solidFill>
                 <a:latin typeface="PingFang SC"/>
               </a:rPr>
-              <a:t>03 / 10</a:t>
+              <a:t>03 / 11</a:t>
             </a:r>
           </a:p>
         </p:txBody>
@@ -5504,7 +6100,7 @@
                 </a:solidFill>
                 <a:latin typeface="PingFang SC"/>
               </a:rPr>
-              <a:t>04 / 10</a:t>
+              <a:t>04 / 11</a:t>
             </a:r>
           </a:p>
         </p:txBody>
@@ -6695,7 +7291,7 @@
                 </a:solidFill>
                 <a:latin typeface="PingFang SC"/>
               </a:rPr>
-              <a:t>05 / 10</a:t>
+              <a:t>05 / 11</a:t>
             </a:r>
           </a:p>
         </p:txBody>
@@ -8338,7 +8934,7 @@
                 </a:solidFill>
                 <a:latin typeface="PingFang SC"/>
               </a:rPr>
-              <a:t>06 / 10</a:t>
+              <a:t>06 / 11</a:t>
             </a:r>
           </a:p>
         </p:txBody>
@@ -8373,7 +8969,7 @@
                 </a:solidFill>
                 <a:latin typeface="Helvetica"/>
               </a:rPr>
-              <a:t>14 维度 </a:t>
+              <a:t>18 维度 </a:t>
             </a:r>
             <a:r>
               <a:rPr sz="3600" b="1">
@@ -9759,7 +10355,7 @@
                 </a:solidFill>
                 <a:latin typeface="PingFang SC"/>
               </a:rPr>
-              <a:t>07 / 10</a:t>
+              <a:t>07 / 11</a:t>
             </a:r>
           </a:p>
         </p:txBody>
@@ -10984,7 +11580,7 @@
                 </a:solidFill>
                 <a:latin typeface="PingFang SC"/>
               </a:rPr>
-              <a:t>08 / 10</a:t>
+              <a:t>08 / 11</a:t>
             </a:r>
           </a:p>
         </p:txBody>
@@ -11772,7 +12368,7 @@
                 </a:solidFill>
                 <a:latin typeface="PingFang SC"/>
               </a:rPr>
-              <a:t>09 / 10</a:t>
+              <a:t>09 / 11</a:t>
             </a:r>
           </a:p>
         </p:txBody>
